--- a/Especializacion/Proyecto I/Clases/Sesion 09 - Poblaciónmuestra, técnicas e instrumentos (propuestos)/Presentacion.pptx
+++ b/Especializacion/Proyecto I/Clases/Sesion 09 - Poblaciónmuestra, técnicas e instrumentos (propuestos)/Presentacion.pptx
@@ -3366,41 +3366,6 @@
           </a:p>
         </p:txBody>
       </p:sp>
-      <p:sp>
-        <p:nvSpPr>
-          <p:cNvPr id="7" name="TextBox 6"/>
-          <p:cNvSpPr txBox="1"/>
-          <p:nvPr/>
-        </p:nvSpPr>
-        <p:spPr>
-          <a:xfrm>
-            <a:off x="2194560" y="6446520"/>
-            <a:ext cx="5943600" cy="274320"/>
-          </a:xfrm>
-          <a:prstGeom prst="rect">
-            <a:avLst/>
-          </a:prstGeom>
-          <a:noFill/>
-        </p:spPr>
-        <p:txBody>
-          <a:bodyPr wrap="square" anchor="t" lIns="0" rIns="0" tIns="0" bIns="0">
-            <a:spAutoFit/>
-          </a:bodyPr>
-          <a:lstStyle/>
-          <a:p>
-            <a:pPr algn="l"/>
-            <a:r>
-              <a:rPr sz="1000" b="1" i="0">
-                <a:solidFill>
-                  <a:srgbClr val="8F989D"/>
-                </a:solidFill>
-                <a:latin typeface="Calibri"/>
-              </a:rPr>
-              <a:t>Inicio 8:10 pm</a:t>
-            </a:r>
-          </a:p>
-        </p:txBody>
-      </p:sp>
     </p:spTree>
   </p:cSld>
   <p:clrMapOvr>
@@ -3820,41 +3785,6 @@
       <p:sp>
         <p:nvSpPr>
           <p:cNvPr id="5" name="TextBox 4"/>
-          <p:cNvSpPr txBox="1"/>
-          <p:nvPr/>
-        </p:nvSpPr>
-        <p:spPr>
-          <a:xfrm>
-            <a:off x="2194560" y="6446520"/>
-            <a:ext cx="5943600" cy="274320"/>
-          </a:xfrm>
-          <a:prstGeom prst="rect">
-            <a:avLst/>
-          </a:prstGeom>
-          <a:noFill/>
-        </p:spPr>
-        <p:txBody>
-          <a:bodyPr wrap="square" anchor="t" lIns="0" rIns="0" tIns="0" bIns="0">
-            <a:spAutoFit/>
-          </a:bodyPr>
-          <a:lstStyle/>
-          <a:p>
-            <a:pPr algn="l"/>
-            <a:r>
-              <a:rPr sz="1000" b="1" i="0">
-                <a:solidFill>
-                  <a:srgbClr val="8F989D"/>
-                </a:solidFill>
-                <a:latin typeface="Calibri"/>
-              </a:rPr>
-              <a:t>Inicio 8:10 pm</a:t>
-            </a:r>
-          </a:p>
-        </p:txBody>
-      </p:sp>
-      <p:sp>
-        <p:nvSpPr>
-          <p:cNvPr id="6" name="TextBox 5"/>
           <p:cNvSpPr txBox="1"/>
           <p:nvPr/>
         </p:nvSpPr>
@@ -4568,41 +4498,6 @@
         </p:nvSpPr>
         <p:spPr>
           <a:xfrm>
-            <a:off x="2194560" y="6446520"/>
-            <a:ext cx="5943600" cy="274320"/>
-          </a:xfrm>
-          <a:prstGeom prst="rect">
-            <a:avLst/>
-          </a:prstGeom>
-          <a:noFill/>
-        </p:spPr>
-        <p:txBody>
-          <a:bodyPr wrap="square" anchor="t" lIns="0" rIns="0" tIns="0" bIns="0">
-            <a:spAutoFit/>
-          </a:bodyPr>
-          <a:lstStyle/>
-          <a:p>
-            <a:pPr algn="l"/>
-            <a:r>
-              <a:rPr sz="1000" b="1" i="0">
-                <a:solidFill>
-                  <a:srgbClr val="8F989D"/>
-                </a:solidFill>
-                <a:latin typeface="Calibri"/>
-              </a:rPr>
-              <a:t>Inicio 8:10 pm</a:t>
-            </a:r>
-          </a:p>
-        </p:txBody>
-      </p:sp>
-      <p:sp>
-        <p:nvSpPr>
-          <p:cNvPr id="7" name="TextBox 6"/>
-          <p:cNvSpPr txBox="1"/>
-          <p:nvPr/>
-        </p:nvSpPr>
-        <p:spPr>
-          <a:xfrm>
             <a:off x="11094415" y="6446520"/>
             <a:ext cx="548640" cy="274320"/>
           </a:xfrm>
@@ -4982,41 +4877,6 @@
         </p:nvSpPr>
         <p:spPr>
           <a:xfrm>
-            <a:off x="2194560" y="6446520"/>
-            <a:ext cx="5943600" cy="274320"/>
-          </a:xfrm>
-          <a:prstGeom prst="rect">
-            <a:avLst/>
-          </a:prstGeom>
-          <a:noFill/>
-        </p:spPr>
-        <p:txBody>
-          <a:bodyPr wrap="square" anchor="t" lIns="0" rIns="0" tIns="0" bIns="0">
-            <a:spAutoFit/>
-          </a:bodyPr>
-          <a:lstStyle/>
-          <a:p>
-            <a:pPr algn="l"/>
-            <a:r>
-              <a:rPr sz="1000" b="1" i="0">
-                <a:solidFill>
-                  <a:srgbClr val="8F989D"/>
-                </a:solidFill>
-                <a:latin typeface="Calibri"/>
-              </a:rPr>
-              <a:t>Inicio 8:10 pm</a:t>
-            </a:r>
-          </a:p>
-        </p:txBody>
-      </p:sp>
-      <p:sp>
-        <p:nvSpPr>
-          <p:cNvPr id="6" name="TextBox 5"/>
-          <p:cNvSpPr txBox="1"/>
-          <p:nvPr/>
-        </p:nvSpPr>
-        <p:spPr>
-          <a:xfrm>
             <a:off x="11094415" y="6446520"/>
             <a:ext cx="548640" cy="274320"/>
           </a:xfrm>
@@ -5046,7 +4906,7 @@
       </p:sp>
       <p:sp>
         <p:nvSpPr>
-          <p:cNvPr id="7" name="TextBox 6"/>
+          <p:cNvPr id="6" name="TextBox 5"/>
           <p:cNvSpPr txBox="1"/>
           <p:nvPr/>
         </p:nvSpPr>
@@ -5554,41 +5414,6 @@
         </p:nvSpPr>
         <p:spPr>
           <a:xfrm>
-            <a:off x="2194560" y="6446520"/>
-            <a:ext cx="5943600" cy="274320"/>
-          </a:xfrm>
-          <a:prstGeom prst="rect">
-            <a:avLst/>
-          </a:prstGeom>
-          <a:noFill/>
-        </p:spPr>
-        <p:txBody>
-          <a:bodyPr wrap="square" anchor="t" lIns="0" rIns="0" tIns="0" bIns="0">
-            <a:spAutoFit/>
-          </a:bodyPr>
-          <a:lstStyle/>
-          <a:p>
-            <a:pPr algn="l"/>
-            <a:r>
-              <a:rPr sz="1000" b="1" i="0">
-                <a:solidFill>
-                  <a:srgbClr val="8F989D"/>
-                </a:solidFill>
-                <a:latin typeface="Calibri"/>
-              </a:rPr>
-              <a:t>Inicio 8:10 pm</a:t>
-            </a:r>
-          </a:p>
-        </p:txBody>
-      </p:sp>
-      <p:sp>
-        <p:nvSpPr>
-          <p:cNvPr id="11" name="TextBox 10"/>
-          <p:cNvSpPr txBox="1"/>
-          <p:nvPr/>
-        </p:nvSpPr>
-        <p:spPr>
-          <a:xfrm>
             <a:off x="11094415" y="6446520"/>
             <a:ext cx="548640" cy="274320"/>
           </a:xfrm>
@@ -5832,41 +5657,6 @@
         </p:nvSpPr>
         <p:spPr>
           <a:xfrm>
-            <a:off x="2194560" y="6446520"/>
-            <a:ext cx="5943600" cy="274320"/>
-          </a:xfrm>
-          <a:prstGeom prst="rect">
-            <a:avLst/>
-          </a:prstGeom>
-          <a:noFill/>
-        </p:spPr>
-        <p:txBody>
-          <a:bodyPr wrap="square" anchor="t" lIns="0" rIns="0" tIns="0" bIns="0">
-            <a:spAutoFit/>
-          </a:bodyPr>
-          <a:lstStyle/>
-          <a:p>
-            <a:pPr algn="l"/>
-            <a:r>
-              <a:rPr sz="1000" b="1" i="0">
-                <a:solidFill>
-                  <a:srgbClr val="8F989D"/>
-                </a:solidFill>
-                <a:latin typeface="Calibri"/>
-              </a:rPr>
-              <a:t>Inicio 8:10 pm</a:t>
-            </a:r>
-          </a:p>
-        </p:txBody>
-      </p:sp>
-      <p:sp>
-        <p:nvSpPr>
-          <p:cNvPr id="7" name="TextBox 6"/>
-          <p:cNvSpPr txBox="1"/>
-          <p:nvPr/>
-        </p:nvSpPr>
-        <p:spPr>
-          <a:xfrm>
             <a:off x="11094415" y="6446520"/>
             <a:ext cx="548640" cy="274320"/>
           </a:xfrm>
@@ -6480,41 +6270,6 @@
         </p:nvSpPr>
         <p:spPr>
           <a:xfrm>
-            <a:off x="2194560" y="6446520"/>
-            <a:ext cx="5943600" cy="274320"/>
-          </a:xfrm>
-          <a:prstGeom prst="rect">
-            <a:avLst/>
-          </a:prstGeom>
-          <a:noFill/>
-        </p:spPr>
-        <p:txBody>
-          <a:bodyPr wrap="square" anchor="t" lIns="0" rIns="0" tIns="0" bIns="0">
-            <a:spAutoFit/>
-          </a:bodyPr>
-          <a:lstStyle/>
-          <a:p>
-            <a:pPr algn="l"/>
-            <a:r>
-              <a:rPr sz="1000" b="1" i="0">
-                <a:solidFill>
-                  <a:srgbClr val="8F989D"/>
-                </a:solidFill>
-                <a:latin typeface="Calibri"/>
-              </a:rPr>
-              <a:t>Inicio 8:10 pm</a:t>
-            </a:r>
-          </a:p>
-        </p:txBody>
-      </p:sp>
-      <p:sp>
-        <p:nvSpPr>
-          <p:cNvPr id="6" name="TextBox 5"/>
-          <p:cNvSpPr txBox="1"/>
-          <p:nvPr/>
-        </p:nvSpPr>
-        <p:spPr>
-          <a:xfrm>
             <a:off x="11094415" y="6446520"/>
             <a:ext cx="548640" cy="274320"/>
           </a:xfrm>
@@ -6544,7 +6299,7 @@
       </p:sp>
       <p:sp>
         <p:nvSpPr>
-          <p:cNvPr id="7" name="TextBox 6"/>
+          <p:cNvPr id="6" name="TextBox 5"/>
           <p:cNvSpPr txBox="1"/>
           <p:nvPr/>
         </p:nvSpPr>
@@ -7252,41 +7007,6 @@
         </p:nvSpPr>
         <p:spPr>
           <a:xfrm>
-            <a:off x="2194560" y="6446520"/>
-            <a:ext cx="5943600" cy="274320"/>
-          </a:xfrm>
-          <a:prstGeom prst="rect">
-            <a:avLst/>
-          </a:prstGeom>
-          <a:noFill/>
-        </p:spPr>
-        <p:txBody>
-          <a:bodyPr wrap="square" anchor="t" lIns="0" rIns="0" tIns="0" bIns="0">
-            <a:spAutoFit/>
-          </a:bodyPr>
-          <a:lstStyle/>
-          <a:p>
-            <a:pPr algn="l"/>
-            <a:r>
-              <a:rPr sz="1000" b="1" i="0">
-                <a:solidFill>
-                  <a:srgbClr val="8F989D"/>
-                </a:solidFill>
-                <a:latin typeface="Calibri"/>
-              </a:rPr>
-              <a:t>Inicio 8:10 pm</a:t>
-            </a:r>
-          </a:p>
-        </p:txBody>
-      </p:sp>
-      <p:sp>
-        <p:nvSpPr>
-          <p:cNvPr id="6" name="TextBox 5"/>
-          <p:cNvSpPr txBox="1"/>
-          <p:nvPr/>
-        </p:nvSpPr>
-        <p:spPr>
-          <a:xfrm>
             <a:off x="11094415" y="6446520"/>
             <a:ext cx="548640" cy="274320"/>
           </a:xfrm>
@@ -7792,41 +7512,6 @@
         </p:nvSpPr>
         <p:spPr>
           <a:xfrm>
-            <a:off x="2194560" y="6446520"/>
-            <a:ext cx="5943600" cy="274320"/>
-          </a:xfrm>
-          <a:prstGeom prst="rect">
-            <a:avLst/>
-          </a:prstGeom>
-          <a:noFill/>
-        </p:spPr>
-        <p:txBody>
-          <a:bodyPr wrap="square" anchor="t" lIns="0" rIns="0" tIns="0" bIns="0">
-            <a:spAutoFit/>
-          </a:bodyPr>
-          <a:lstStyle/>
-          <a:p>
-            <a:pPr algn="l"/>
-            <a:r>
-              <a:rPr sz="1000" b="1" i="0">
-                <a:solidFill>
-                  <a:srgbClr val="8F989D"/>
-                </a:solidFill>
-                <a:latin typeface="Calibri"/>
-              </a:rPr>
-              <a:t>Inicio 8:10 pm</a:t>
-            </a:r>
-          </a:p>
-        </p:txBody>
-      </p:sp>
-      <p:sp>
-        <p:nvSpPr>
-          <p:cNvPr id="6" name="TextBox 5"/>
-          <p:cNvSpPr txBox="1"/>
-          <p:nvPr/>
-        </p:nvSpPr>
-        <p:spPr>
-          <a:xfrm>
             <a:off x="11094415" y="6446520"/>
             <a:ext cx="548640" cy="274320"/>
           </a:xfrm>
@@ -8260,41 +7945,6 @@
         </p:nvSpPr>
         <p:spPr>
           <a:xfrm>
-            <a:off x="2194560" y="6446520"/>
-            <a:ext cx="5943600" cy="274320"/>
-          </a:xfrm>
-          <a:prstGeom prst="rect">
-            <a:avLst/>
-          </a:prstGeom>
-          <a:noFill/>
-        </p:spPr>
-        <p:txBody>
-          <a:bodyPr wrap="square" anchor="t" lIns="0" rIns="0" tIns="0" bIns="0">
-            <a:spAutoFit/>
-          </a:bodyPr>
-          <a:lstStyle/>
-          <a:p>
-            <a:pPr algn="l"/>
-            <a:r>
-              <a:rPr sz="1000" b="1" i="0">
-                <a:solidFill>
-                  <a:srgbClr val="8F989D"/>
-                </a:solidFill>
-                <a:latin typeface="Calibri"/>
-              </a:rPr>
-              <a:t>Inicio 8:10 pm</a:t>
-            </a:r>
-          </a:p>
-        </p:txBody>
-      </p:sp>
-      <p:sp>
-        <p:nvSpPr>
-          <p:cNvPr id="6" name="TextBox 5"/>
-          <p:cNvSpPr txBox="1"/>
-          <p:nvPr/>
-        </p:nvSpPr>
-        <p:spPr>
-          <a:xfrm>
             <a:off x="11094415" y="6446520"/>
             <a:ext cx="548640" cy="274320"/>
           </a:xfrm>
@@ -8541,41 +8191,6 @@
           </a:p>
         </p:txBody>
       </p:sp>
-      <p:sp>
-        <p:nvSpPr>
-          <p:cNvPr id="7" name="TextBox 6"/>
-          <p:cNvSpPr txBox="1"/>
-          <p:nvPr/>
-        </p:nvSpPr>
-        <p:spPr>
-          <a:xfrm>
-            <a:off x="2194560" y="6446520"/>
-            <a:ext cx="5943600" cy="274320"/>
-          </a:xfrm>
-          <a:prstGeom prst="rect">
-            <a:avLst/>
-          </a:prstGeom>
-          <a:noFill/>
-        </p:spPr>
-        <p:txBody>
-          <a:bodyPr wrap="square" anchor="t" lIns="0" rIns="0" tIns="0" bIns="0">
-            <a:spAutoFit/>
-          </a:bodyPr>
-          <a:lstStyle/>
-          <a:p>
-            <a:pPr algn="l"/>
-            <a:r>
-              <a:rPr sz="1000" b="1" i="0">
-                <a:solidFill>
-                  <a:srgbClr val="8F989D"/>
-                </a:solidFill>
-                <a:latin typeface="Calibri"/>
-              </a:rPr>
-              <a:t>Inicio 8:10 pm</a:t>
-            </a:r>
-          </a:p>
-        </p:txBody>
-      </p:sp>
     </p:spTree>
   </p:cSld>
   <p:clrMapOvr>
@@ -8982,41 +8597,6 @@
         </p:nvSpPr>
         <p:spPr>
           <a:xfrm>
-            <a:off x="2194560" y="6446520"/>
-            <a:ext cx="5943600" cy="274320"/>
-          </a:xfrm>
-          <a:prstGeom prst="rect">
-            <a:avLst/>
-          </a:prstGeom>
-          <a:noFill/>
-        </p:spPr>
-        <p:txBody>
-          <a:bodyPr wrap="square" anchor="t" lIns="0" rIns="0" tIns="0" bIns="0">
-            <a:spAutoFit/>
-          </a:bodyPr>
-          <a:lstStyle/>
-          <a:p>
-            <a:pPr algn="l"/>
-            <a:r>
-              <a:rPr sz="1000" b="1" i="0">
-                <a:solidFill>
-                  <a:srgbClr val="8F989D"/>
-                </a:solidFill>
-                <a:latin typeface="Calibri"/>
-              </a:rPr>
-              <a:t>Inicio 8:10 pm</a:t>
-            </a:r>
-          </a:p>
-        </p:txBody>
-      </p:sp>
-      <p:sp>
-        <p:nvSpPr>
-          <p:cNvPr id="6" name="TextBox 5"/>
-          <p:cNvSpPr txBox="1"/>
-          <p:nvPr/>
-        </p:nvSpPr>
-        <p:spPr>
-          <a:xfrm>
             <a:off x="11094415" y="6446520"/>
             <a:ext cx="548640" cy="274320"/>
           </a:xfrm>
@@ -9454,41 +9034,6 @@
       <p:sp>
         <p:nvSpPr>
           <p:cNvPr id="5" name="TextBox 4"/>
-          <p:cNvSpPr txBox="1"/>
-          <p:nvPr/>
-        </p:nvSpPr>
-        <p:spPr>
-          <a:xfrm>
-            <a:off x="2194560" y="6446520"/>
-            <a:ext cx="5943600" cy="274320"/>
-          </a:xfrm>
-          <a:prstGeom prst="rect">
-            <a:avLst/>
-          </a:prstGeom>
-          <a:noFill/>
-        </p:spPr>
-        <p:txBody>
-          <a:bodyPr wrap="square" anchor="t" lIns="0" rIns="0" tIns="0" bIns="0">
-            <a:spAutoFit/>
-          </a:bodyPr>
-          <a:lstStyle/>
-          <a:p>
-            <a:pPr algn="l"/>
-            <a:r>
-              <a:rPr sz="1000" b="1" i="0">
-                <a:solidFill>
-                  <a:srgbClr val="8F989D"/>
-                </a:solidFill>
-                <a:latin typeface="Calibri"/>
-              </a:rPr>
-              <a:t>Inicio 8:10 pm</a:t>
-            </a:r>
-          </a:p>
-        </p:txBody>
-      </p:sp>
-      <p:sp>
-        <p:nvSpPr>
-          <p:cNvPr id="6" name="TextBox 5"/>
           <p:cNvSpPr txBox="1"/>
           <p:nvPr/>
         </p:nvSpPr>
@@ -10368,41 +9913,6 @@
         </p:nvSpPr>
         <p:spPr>
           <a:xfrm>
-            <a:off x="2194560" y="6446520"/>
-            <a:ext cx="5943600" cy="274320"/>
-          </a:xfrm>
-          <a:prstGeom prst="rect">
-            <a:avLst/>
-          </a:prstGeom>
-          <a:noFill/>
-        </p:spPr>
-        <p:txBody>
-          <a:bodyPr wrap="square" anchor="t" lIns="0" rIns="0" tIns="0" bIns="0">
-            <a:spAutoFit/>
-          </a:bodyPr>
-          <a:lstStyle/>
-          <a:p>
-            <a:pPr algn="l"/>
-            <a:r>
-              <a:rPr sz="1000" b="1" i="0">
-                <a:solidFill>
-                  <a:srgbClr val="8F989D"/>
-                </a:solidFill>
-                <a:latin typeface="Calibri"/>
-              </a:rPr>
-              <a:t>Inicio 8:10 pm</a:t>
-            </a:r>
-          </a:p>
-        </p:txBody>
-      </p:sp>
-      <p:sp>
-        <p:nvSpPr>
-          <p:cNvPr id="7" name="TextBox 6"/>
-          <p:cNvSpPr txBox="1"/>
-          <p:nvPr/>
-        </p:nvSpPr>
-        <p:spPr>
-          <a:xfrm>
             <a:off x="11094415" y="6446520"/>
             <a:ext cx="548640" cy="274320"/>
           </a:xfrm>
@@ -10903,41 +10413,6 @@
       <p:sp>
         <p:nvSpPr>
           <p:cNvPr id="5" name="TextBox 4"/>
-          <p:cNvSpPr txBox="1"/>
-          <p:nvPr/>
-        </p:nvSpPr>
-        <p:spPr>
-          <a:xfrm>
-            <a:off x="2194560" y="6446520"/>
-            <a:ext cx="5943600" cy="274320"/>
-          </a:xfrm>
-          <a:prstGeom prst="rect">
-            <a:avLst/>
-          </a:prstGeom>
-          <a:noFill/>
-        </p:spPr>
-        <p:txBody>
-          <a:bodyPr wrap="square" anchor="t" lIns="0" rIns="0" tIns="0" bIns="0">
-            <a:spAutoFit/>
-          </a:bodyPr>
-          <a:lstStyle/>
-          <a:p>
-            <a:pPr algn="l"/>
-            <a:r>
-              <a:rPr sz="1000" b="1" i="0">
-                <a:solidFill>
-                  <a:srgbClr val="8F989D"/>
-                </a:solidFill>
-                <a:latin typeface="Calibri"/>
-              </a:rPr>
-              <a:t>Inicio 8:10 pm</a:t>
-            </a:r>
-          </a:p>
-        </p:txBody>
-      </p:sp>
-      <p:sp>
-        <p:nvSpPr>
-          <p:cNvPr id="6" name="TextBox 5"/>
           <p:cNvSpPr txBox="1"/>
           <p:nvPr/>
         </p:nvSpPr>
@@ -11811,41 +11286,6 @@
         </p:nvSpPr>
         <p:spPr>
           <a:xfrm>
-            <a:off x="2194560" y="6446520"/>
-            <a:ext cx="5943600" cy="274320"/>
-          </a:xfrm>
-          <a:prstGeom prst="rect">
-            <a:avLst/>
-          </a:prstGeom>
-          <a:noFill/>
-        </p:spPr>
-        <p:txBody>
-          <a:bodyPr wrap="square" anchor="t" lIns="0" rIns="0" tIns="0" bIns="0">
-            <a:spAutoFit/>
-          </a:bodyPr>
-          <a:lstStyle/>
-          <a:p>
-            <a:pPr algn="l"/>
-            <a:r>
-              <a:rPr sz="1000" b="1" i="0">
-                <a:solidFill>
-                  <a:srgbClr val="8F989D"/>
-                </a:solidFill>
-                <a:latin typeface="Calibri"/>
-              </a:rPr>
-              <a:t>Inicio 8:10 pm</a:t>
-            </a:r>
-          </a:p>
-        </p:txBody>
-      </p:sp>
-      <p:sp>
-        <p:nvSpPr>
-          <p:cNvPr id="7" name="TextBox 6"/>
-          <p:cNvSpPr txBox="1"/>
-          <p:nvPr/>
-        </p:nvSpPr>
-        <p:spPr>
-          <a:xfrm>
             <a:off x="11094415" y="6446520"/>
             <a:ext cx="548640" cy="274320"/>
           </a:xfrm>
@@ -12387,41 +11827,6 @@
         </p:nvSpPr>
         <p:spPr>
           <a:xfrm>
-            <a:off x="2194560" y="6446520"/>
-            <a:ext cx="5943600" cy="274320"/>
-          </a:xfrm>
-          <a:prstGeom prst="rect">
-            <a:avLst/>
-          </a:prstGeom>
-          <a:noFill/>
-        </p:spPr>
-        <p:txBody>
-          <a:bodyPr wrap="square" anchor="t" lIns="0" rIns="0" tIns="0" bIns="0">
-            <a:spAutoFit/>
-          </a:bodyPr>
-          <a:lstStyle/>
-          <a:p>
-            <a:pPr algn="l"/>
-            <a:r>
-              <a:rPr sz="1000" b="1" i="0">
-                <a:solidFill>
-                  <a:srgbClr val="8F989D"/>
-                </a:solidFill>
-                <a:latin typeface="Calibri"/>
-              </a:rPr>
-              <a:t>Inicio 8:10 pm</a:t>
-            </a:r>
-          </a:p>
-        </p:txBody>
-      </p:sp>
-      <p:sp>
-        <p:nvSpPr>
-          <p:cNvPr id="6" name="TextBox 5"/>
-          <p:cNvSpPr txBox="1"/>
-          <p:nvPr/>
-        </p:nvSpPr>
-        <p:spPr>
-          <a:xfrm>
             <a:off x="11094415" y="6446520"/>
             <a:ext cx="548640" cy="274320"/>
           </a:xfrm>
@@ -12893,41 +12298,6 @@
       <p:sp>
         <p:nvSpPr>
           <p:cNvPr id="10" name="TextBox 9"/>
-          <p:cNvSpPr txBox="1"/>
-          <p:nvPr/>
-        </p:nvSpPr>
-        <p:spPr>
-          <a:xfrm>
-            <a:off x="2194560" y="6446520"/>
-            <a:ext cx="5943600" cy="274320"/>
-          </a:xfrm>
-          <a:prstGeom prst="rect">
-            <a:avLst/>
-          </a:prstGeom>
-          <a:noFill/>
-        </p:spPr>
-        <p:txBody>
-          <a:bodyPr wrap="square" anchor="t" lIns="0" rIns="0" tIns="0" bIns="0">
-            <a:spAutoFit/>
-          </a:bodyPr>
-          <a:lstStyle/>
-          <a:p>
-            <a:pPr algn="l"/>
-            <a:r>
-              <a:rPr sz="1000" b="1" i="0">
-                <a:solidFill>
-                  <a:srgbClr val="8F989D"/>
-                </a:solidFill>
-                <a:latin typeface="Calibri"/>
-              </a:rPr>
-              <a:t>Inicio 8:10 pm</a:t>
-            </a:r>
-          </a:p>
-        </p:txBody>
-      </p:sp>
-      <p:sp>
-        <p:nvSpPr>
-          <p:cNvPr id="11" name="TextBox 10"/>
           <p:cNvSpPr txBox="1"/>
           <p:nvPr/>
         </p:nvSpPr>
@@ -13986,41 +13356,6 @@
         </p:nvSpPr>
         <p:spPr>
           <a:xfrm>
-            <a:off x="2194560" y="6446520"/>
-            <a:ext cx="5943600" cy="274320"/>
-          </a:xfrm>
-          <a:prstGeom prst="rect">
-            <a:avLst/>
-          </a:prstGeom>
-          <a:noFill/>
-        </p:spPr>
-        <p:txBody>
-          <a:bodyPr wrap="square" anchor="t" lIns="0" rIns="0" tIns="0" bIns="0">
-            <a:spAutoFit/>
-          </a:bodyPr>
-          <a:lstStyle/>
-          <a:p>
-            <a:pPr algn="l"/>
-            <a:r>
-              <a:rPr sz="1000" b="1" i="0">
-                <a:solidFill>
-                  <a:srgbClr val="8F989D"/>
-                </a:solidFill>
-                <a:latin typeface="Calibri"/>
-              </a:rPr>
-              <a:t>Inicio 8:10 pm</a:t>
-            </a:r>
-          </a:p>
-        </p:txBody>
-      </p:sp>
-      <p:sp>
-        <p:nvSpPr>
-          <p:cNvPr id="7" name="TextBox 6"/>
-          <p:cNvSpPr txBox="1"/>
-          <p:nvPr/>
-        </p:nvSpPr>
-        <p:spPr>
-          <a:xfrm>
             <a:off x="11094415" y="6446520"/>
             <a:ext cx="548640" cy="274320"/>
           </a:xfrm>
